--- a/output_pptx/Cornerstone.pptx
+++ b/output_pptx/Cornerstone.pptx
@@ -3109,8 +3109,8 @@
         </p:nvSpPr>
         <p:spPr>
           <a:xfrm>
-            <a:off x="594360" y="2258568"/>
-            <a:ext cx="11002975" cy="685800"/>
+            <a:off x="640080" y="2052828"/>
+            <a:ext cx="10911535" cy="731520"/>
           </a:xfrm>
           <a:prstGeom prst="rect">
             <a:avLst/>
@@ -3125,7 +3125,7 @@
           <a:p>
             <a:pPr algn="ctr"/>
             <a:r>
-              <a:rPr sz="4400" b="1" i="0">
+              <a:rPr sz="4800" b="1" i="0">
                 <a:solidFill>
                   <a:srgbClr val="FFFFFF"/>
                 </a:solidFill>
@@ -3144,8 +3144,8 @@
         </p:nvSpPr>
         <p:spPr>
           <a:xfrm>
-            <a:off x="594360" y="2980944"/>
-            <a:ext cx="11002975" cy="347472"/>
+            <a:off x="640080" y="2985516"/>
+            <a:ext cx="10911535" cy="731520"/>
           </a:xfrm>
           <a:prstGeom prst="rect">
             <a:avLst/>
@@ -3160,83 +3160,13 @@
           <a:p>
             <a:pPr algn="ctr"/>
             <a:r>
-              <a:rPr sz="2200" b="0" i="1">
-                <a:solidFill>
-                  <a:srgbClr val="8C8C8C"/>
-                </a:solidFill>
-                <a:latin typeface="Arial"/>
-              </a:rPr>
-              <a:t/>
-            </a:r>
-          </a:p>
-        </p:txBody>
-      </p:sp>
-      <p:sp>
-        <p:nvSpPr>
-          <p:cNvPr id="4" name="TextBox 3"/>
-          <p:cNvSpPr txBox="1"/>
-          <p:nvPr/>
-        </p:nvSpPr>
-        <p:spPr>
-          <a:xfrm>
-            <a:off x="594360" y="3529584"/>
-            <a:ext cx="11002975" cy="685800"/>
-          </a:xfrm>
-          <a:prstGeom prst="rect">
-            <a:avLst/>
-          </a:prstGeom>
-          <a:noFill/>
-        </p:spPr>
-        <p:txBody>
-          <a:bodyPr wrap="square">
-            <a:spAutoFit/>
-          </a:bodyPr>
-          <a:lstStyle/>
-          <a:p>
-            <a:pPr algn="ctr"/>
-            <a:r>
-              <a:rPr sz="4400" b="1" i="0">
+              <a:rPr sz="4800" b="1" i="0">
                 <a:solidFill>
                   <a:srgbClr val="FFFFFF"/>
                 </a:solidFill>
                 <a:latin typeface="Arial"/>
               </a:rPr>
               <a:t>Minha esperança está firmada</a:t>
-            </a:r>
-          </a:p>
-        </p:txBody>
-      </p:sp>
-      <p:sp>
-        <p:nvSpPr>
-          <p:cNvPr id="5" name="TextBox 4"/>
-          <p:cNvSpPr txBox="1"/>
-          <p:nvPr/>
-        </p:nvSpPr>
-        <p:spPr>
-          <a:xfrm>
-            <a:off x="594360" y="4251960"/>
-            <a:ext cx="11002975" cy="347472"/>
-          </a:xfrm>
-          <a:prstGeom prst="rect">
-            <a:avLst/>
-          </a:prstGeom>
-          <a:noFill/>
-        </p:spPr>
-        <p:txBody>
-          <a:bodyPr wrap="square">
-            <a:spAutoFit/>
-          </a:bodyPr>
-          <a:lstStyle/>
-          <a:p>
-            <a:pPr algn="ctr"/>
-            <a:r>
-              <a:rPr sz="2200" b="0" i="1">
-                <a:solidFill>
-                  <a:srgbClr val="8C8C8C"/>
-                </a:solidFill>
-                <a:latin typeface="Arial"/>
-              </a:rPr>
-              <a:t/>
             </a:r>
           </a:p>
         </p:txBody>
@@ -3275,8 +3205,8 @@
         </p:nvSpPr>
         <p:spPr>
           <a:xfrm>
-            <a:off x="594360" y="2258568"/>
-            <a:ext cx="11002975" cy="685800"/>
+            <a:off x="640080" y="2052828"/>
+            <a:ext cx="10911535" cy="731520"/>
           </a:xfrm>
           <a:prstGeom prst="rect">
             <a:avLst/>
@@ -3291,7 +3221,7 @@
           <a:p>
             <a:pPr algn="ctr"/>
             <a:r>
-              <a:rPr sz="4400" b="1" i="0">
+              <a:rPr sz="4800" b="1" i="0">
                 <a:solidFill>
                   <a:srgbClr val="FFFFFF"/>
                 </a:solidFill>
@@ -3310,8 +3240,8 @@
         </p:nvSpPr>
         <p:spPr>
           <a:xfrm>
-            <a:off x="594360" y="2980944"/>
-            <a:ext cx="11002975" cy="347472"/>
+            <a:off x="640080" y="2985516"/>
+            <a:ext cx="10911535" cy="731520"/>
           </a:xfrm>
           <a:prstGeom prst="rect">
             <a:avLst/>
@@ -3326,83 +3256,13 @@
           <a:p>
             <a:pPr algn="ctr"/>
             <a:r>
-              <a:rPr sz="2200" b="0" i="1">
-                <a:solidFill>
-                  <a:srgbClr val="8C8C8C"/>
-                </a:solidFill>
-                <a:latin typeface="Arial"/>
-              </a:rPr>
-              <a:t/>
-            </a:r>
-          </a:p>
-        </p:txBody>
-      </p:sp>
-      <p:sp>
-        <p:nvSpPr>
-          <p:cNvPr id="4" name="TextBox 3"/>
-          <p:cNvSpPr txBox="1"/>
-          <p:nvPr/>
-        </p:nvSpPr>
-        <p:spPr>
-          <a:xfrm>
-            <a:off x="594360" y="3529584"/>
-            <a:ext cx="11002975" cy="685800"/>
-          </a:xfrm>
-          <a:prstGeom prst="rect">
-            <a:avLst/>
-          </a:prstGeom>
-          <a:noFill/>
-        </p:spPr>
-        <p:txBody>
-          <a:bodyPr wrap="square">
-            <a:spAutoFit/>
-          </a:bodyPr>
-          <a:lstStyle/>
-          <a:p>
-            <a:pPr algn="ctr"/>
-            <a:r>
-              <a:rPr sz="4141" b="1" i="0">
+              <a:rPr sz="4500" b="1" i="0">
                 <a:solidFill>
                   <a:srgbClr val="FFFFFF"/>
                 </a:solidFill>
                 <a:latin typeface="Arial"/>
               </a:rPr>
               <a:t>Não ouso confiar em bondade alguma</a:t>
-            </a:r>
-          </a:p>
-        </p:txBody>
-      </p:sp>
-      <p:sp>
-        <p:nvSpPr>
-          <p:cNvPr id="5" name="TextBox 4"/>
-          <p:cNvSpPr txBox="1"/>
-          <p:nvPr/>
-        </p:nvSpPr>
-        <p:spPr>
-          <a:xfrm>
-            <a:off x="594360" y="4251960"/>
-            <a:ext cx="11002975" cy="347472"/>
-          </a:xfrm>
-          <a:prstGeom prst="rect">
-            <a:avLst/>
-          </a:prstGeom>
-          <a:noFill/>
-        </p:spPr>
-        <p:txBody>
-          <a:bodyPr wrap="square">
-            <a:spAutoFit/>
-          </a:bodyPr>
-          <a:lstStyle/>
-          <a:p>
-            <a:pPr algn="ctr"/>
-            <a:r>
-              <a:rPr sz="2200" b="0" i="1">
-                <a:solidFill>
-                  <a:srgbClr val="8C8C8C"/>
-                </a:solidFill>
-                <a:latin typeface="Arial"/>
-              </a:rPr>
-              <a:t/>
             </a:r>
           </a:p>
         </p:txBody>
@@ -3441,8 +3301,8 @@
         </p:nvSpPr>
         <p:spPr>
           <a:xfrm>
-            <a:off x="594360" y="2258568"/>
-            <a:ext cx="11002975" cy="685800"/>
+            <a:off x="640080" y="2052828"/>
+            <a:ext cx="10911535" cy="731520"/>
           </a:xfrm>
           <a:prstGeom prst="rect">
             <a:avLst/>
@@ -3457,7 +3317,7 @@
           <a:p>
             <a:pPr algn="ctr"/>
             <a:r>
-              <a:rPr sz="4400" b="1" i="0">
+              <a:rPr sz="4800" b="1" i="0">
                 <a:solidFill>
                   <a:srgbClr val="FFFFFF"/>
                 </a:solidFill>
@@ -3476,8 +3336,8 @@
         </p:nvSpPr>
         <p:spPr>
           <a:xfrm>
-            <a:off x="594360" y="2980944"/>
-            <a:ext cx="11002975" cy="347472"/>
+            <a:off x="640080" y="2985516"/>
+            <a:ext cx="10911535" cy="731520"/>
           </a:xfrm>
           <a:prstGeom prst="rect">
             <a:avLst/>
@@ -3492,83 +3352,13 @@
           <a:p>
             <a:pPr algn="ctr"/>
             <a:r>
-              <a:rPr sz="2200" b="0" i="1">
-                <a:solidFill>
-                  <a:srgbClr val="8C8C8C"/>
-                </a:solidFill>
-                <a:latin typeface="Arial"/>
-              </a:rPr>
-              <a:t/>
-            </a:r>
-          </a:p>
-        </p:txBody>
-      </p:sp>
-      <p:sp>
-        <p:nvSpPr>
-          <p:cNvPr id="4" name="TextBox 3"/>
-          <p:cNvSpPr txBox="1"/>
-          <p:nvPr/>
-        </p:nvSpPr>
-        <p:spPr>
-          <a:xfrm>
-            <a:off x="594360" y="3529584"/>
-            <a:ext cx="11002975" cy="685800"/>
-          </a:xfrm>
-          <a:prstGeom prst="rect">
-            <a:avLst/>
-          </a:prstGeom>
-          <a:noFill/>
-        </p:spPr>
-        <p:txBody>
-          <a:bodyPr wrap="square">
-            <a:spAutoFit/>
-          </a:bodyPr>
-          <a:lstStyle/>
-          <a:p>
-            <a:pPr algn="ctr"/>
-            <a:r>
-              <a:rPr sz="3274" b="1" i="0">
+              <a:rPr sz="3500" b="1" i="0">
                 <a:solidFill>
                   <a:srgbClr val="FFFFFF"/>
                 </a:solidFill>
                 <a:latin typeface="Arial"/>
               </a:rPr>
               <a:t>Quando as trevas parecem esconder Seu rosto</a:t>
-            </a:r>
-          </a:p>
-        </p:txBody>
-      </p:sp>
-      <p:sp>
-        <p:nvSpPr>
-          <p:cNvPr id="5" name="TextBox 4"/>
-          <p:cNvSpPr txBox="1"/>
-          <p:nvPr/>
-        </p:nvSpPr>
-        <p:spPr>
-          <a:xfrm>
-            <a:off x="594360" y="4251960"/>
-            <a:ext cx="11002975" cy="347472"/>
-          </a:xfrm>
-          <a:prstGeom prst="rect">
-            <a:avLst/>
-          </a:prstGeom>
-          <a:noFill/>
-        </p:spPr>
-        <p:txBody>
-          <a:bodyPr wrap="square">
-            <a:spAutoFit/>
-          </a:bodyPr>
-          <a:lstStyle/>
-          <a:p>
-            <a:pPr algn="ctr"/>
-            <a:r>
-              <a:rPr sz="2200" b="0" i="1">
-                <a:solidFill>
-                  <a:srgbClr val="8C8C8C"/>
-                </a:solidFill>
-                <a:latin typeface="Arial"/>
-              </a:rPr>
-              <a:t/>
             </a:r>
           </a:p>
         </p:txBody>
@@ -3607,8 +3397,8 @@
         </p:nvSpPr>
         <p:spPr>
           <a:xfrm>
-            <a:off x="594360" y="2258568"/>
-            <a:ext cx="11002975" cy="685800"/>
+            <a:off x="640080" y="2052828"/>
+            <a:ext cx="10911535" cy="731520"/>
           </a:xfrm>
           <a:prstGeom prst="rect">
             <a:avLst/>
@@ -3623,7 +3413,7 @@
           <a:p>
             <a:pPr algn="ctr"/>
             <a:r>
-              <a:rPr sz="4266" b="1" i="0">
+              <a:rPr sz="4600" b="1" i="0">
                 <a:solidFill>
                   <a:srgbClr val="FFFFFF"/>
                 </a:solidFill>
@@ -3642,8 +3432,8 @@
         </p:nvSpPr>
         <p:spPr>
           <a:xfrm>
-            <a:off x="594360" y="2980944"/>
-            <a:ext cx="11002975" cy="347472"/>
+            <a:off x="640080" y="2985516"/>
+            <a:ext cx="10911535" cy="731520"/>
           </a:xfrm>
           <a:prstGeom prst="rect">
             <a:avLst/>
@@ -3658,83 +3448,13 @@
           <a:p>
             <a:pPr algn="ctr"/>
             <a:r>
-              <a:rPr sz="2200" b="0" i="1">
-                <a:solidFill>
-                  <a:srgbClr val="8C8C8C"/>
-                </a:solidFill>
-                <a:latin typeface="Arial"/>
-              </a:rPr>
-              <a:t/>
-            </a:r>
-          </a:p>
-        </p:txBody>
-      </p:sp>
-      <p:sp>
-        <p:nvSpPr>
-          <p:cNvPr id="4" name="TextBox 3"/>
-          <p:cNvSpPr txBox="1"/>
-          <p:nvPr/>
-        </p:nvSpPr>
-        <p:spPr>
-          <a:xfrm>
-            <a:off x="594360" y="3529584"/>
-            <a:ext cx="11002975" cy="685800"/>
-          </a:xfrm>
-          <a:prstGeom prst="rect">
-            <a:avLst/>
-          </a:prstGeom>
-          <a:noFill/>
-        </p:spPr>
-        <p:txBody>
-          <a:bodyPr wrap="square">
-            <a:spAutoFit/>
-          </a:bodyPr>
-          <a:lstStyle/>
-          <a:p>
-            <a:pPr algn="ctr"/>
-            <a:r>
-              <a:rPr sz="4141" b="1" i="0">
+              <a:rPr sz="4500" b="1" i="0">
                 <a:solidFill>
                   <a:srgbClr val="FFFFFF"/>
                 </a:solidFill>
                 <a:latin typeface="Arial"/>
               </a:rPr>
               <a:t>Em cada alto e tempestuoso momento</a:t>
-            </a:r>
-          </a:p>
-        </p:txBody>
-      </p:sp>
-      <p:sp>
-        <p:nvSpPr>
-          <p:cNvPr id="5" name="TextBox 4"/>
-          <p:cNvSpPr txBox="1"/>
-          <p:nvPr/>
-        </p:nvSpPr>
-        <p:spPr>
-          <a:xfrm>
-            <a:off x="594360" y="4251960"/>
-            <a:ext cx="11002975" cy="347472"/>
-          </a:xfrm>
-          <a:prstGeom prst="rect">
-            <a:avLst/>
-          </a:prstGeom>
-          <a:noFill/>
-        </p:spPr>
-        <p:txBody>
-          <a:bodyPr wrap="square">
-            <a:spAutoFit/>
-          </a:bodyPr>
-          <a:lstStyle/>
-          <a:p>
-            <a:pPr algn="ctr"/>
-            <a:r>
-              <a:rPr sz="2200" b="0" i="1">
-                <a:solidFill>
-                  <a:srgbClr val="8C8C8C"/>
-                </a:solidFill>
-                <a:latin typeface="Arial"/>
-              </a:rPr>
-              <a:t/>
             </a:r>
           </a:p>
         </p:txBody>
@@ -3773,8 +3493,8 @@
         </p:nvSpPr>
         <p:spPr>
           <a:xfrm>
-            <a:off x="594360" y="2258568"/>
-            <a:ext cx="11002975" cy="685800"/>
+            <a:off x="640080" y="2052828"/>
+            <a:ext cx="10911535" cy="731520"/>
           </a:xfrm>
           <a:prstGeom prst="rect">
             <a:avLst/>
@@ -3789,7 +3509,7 @@
           <a:p>
             <a:pPr algn="ctr"/>
             <a:r>
-              <a:rPr sz="4400" b="1" i="0">
+              <a:rPr sz="4800" b="1" i="0">
                 <a:solidFill>
                   <a:srgbClr val="FFFFFF"/>
                 </a:solidFill>
@@ -3808,8 +3528,8 @@
         </p:nvSpPr>
         <p:spPr>
           <a:xfrm>
-            <a:off x="594360" y="2980944"/>
-            <a:ext cx="11002975" cy="347472"/>
+            <a:off x="640080" y="2985516"/>
+            <a:ext cx="10911535" cy="731520"/>
           </a:xfrm>
           <a:prstGeom prst="rect">
             <a:avLst/>
@@ -3824,83 +3544,13 @@
           <a:p>
             <a:pPr algn="ctr"/>
             <a:r>
-              <a:rPr sz="2200" b="0" i="1">
-                <a:solidFill>
-                  <a:srgbClr val="8C8C8C"/>
-                </a:solidFill>
-                <a:latin typeface="Arial"/>
-              </a:rPr>
-              <a:t/>
-            </a:r>
-          </a:p>
-        </p:txBody>
-      </p:sp>
-      <p:sp>
-        <p:nvSpPr>
-          <p:cNvPr id="4" name="TextBox 3"/>
-          <p:cNvSpPr txBox="1"/>
-          <p:nvPr/>
-        </p:nvSpPr>
-        <p:spPr>
-          <a:xfrm>
-            <a:off x="594360" y="3529584"/>
-            <a:ext cx="11002975" cy="685800"/>
-          </a:xfrm>
-          <a:prstGeom prst="rect">
-            <a:avLst/>
-          </a:prstGeom>
-          <a:noFill/>
-        </p:spPr>
-        <p:txBody>
-          <a:bodyPr wrap="square">
-            <a:spAutoFit/>
-          </a:bodyPr>
-          <a:lstStyle/>
-          <a:p>
-            <a:pPr algn="ctr"/>
-            <a:r>
-              <a:rPr sz="4400" b="1" i="0">
+              <a:rPr sz="4800" b="1" i="0">
                 <a:solidFill>
                   <a:srgbClr val="FFFFFF"/>
                 </a:solidFill>
                 <a:latin typeface="Arial"/>
               </a:rPr>
               <a:t>Só Cristo! Pedra angular</a:t>
-            </a:r>
-          </a:p>
-        </p:txBody>
-      </p:sp>
-      <p:sp>
-        <p:nvSpPr>
-          <p:cNvPr id="5" name="TextBox 4"/>
-          <p:cNvSpPr txBox="1"/>
-          <p:nvPr/>
-        </p:nvSpPr>
-        <p:spPr>
-          <a:xfrm>
-            <a:off x="594360" y="4251960"/>
-            <a:ext cx="11002975" cy="347472"/>
-          </a:xfrm>
-          <a:prstGeom prst="rect">
-            <a:avLst/>
-          </a:prstGeom>
-          <a:noFill/>
-        </p:spPr>
-        <p:txBody>
-          <a:bodyPr wrap="square">
-            <a:spAutoFit/>
-          </a:bodyPr>
-          <a:lstStyle/>
-          <a:p>
-            <a:pPr algn="ctr"/>
-            <a:r>
-              <a:rPr sz="2200" b="0" i="1">
-                <a:solidFill>
-                  <a:srgbClr val="8C8C8C"/>
-                </a:solidFill>
-                <a:latin typeface="Arial"/>
-              </a:rPr>
-              <a:t/>
             </a:r>
           </a:p>
         </p:txBody>
@@ -3939,8 +3589,8 @@
         </p:nvSpPr>
         <p:spPr>
           <a:xfrm>
-            <a:off x="594360" y="2258568"/>
-            <a:ext cx="11002975" cy="685800"/>
+            <a:off x="640080" y="2052828"/>
+            <a:ext cx="10911535" cy="731520"/>
           </a:xfrm>
           <a:prstGeom prst="rect">
             <a:avLst/>
@@ -3955,7 +3605,7 @@
           <a:p>
             <a:pPr algn="ctr"/>
             <a:r>
-              <a:rPr sz="3610" b="1" i="0">
+              <a:rPr sz="3900" b="1" i="0">
                 <a:solidFill>
                   <a:srgbClr val="FFFFFF"/>
                 </a:solidFill>
@@ -3974,8 +3624,8 @@
         </p:nvSpPr>
         <p:spPr>
           <a:xfrm>
-            <a:off x="594360" y="2980944"/>
-            <a:ext cx="11002975" cy="347472"/>
+            <a:off x="640080" y="2985516"/>
+            <a:ext cx="10911535" cy="731520"/>
           </a:xfrm>
           <a:prstGeom prst="rect">
             <a:avLst/>
@@ -3990,83 +3640,13 @@
           <a:p>
             <a:pPr algn="ctr"/>
             <a:r>
-              <a:rPr sz="2200" b="0" i="1">
-                <a:solidFill>
-                  <a:srgbClr val="8C8C8C"/>
-                </a:solidFill>
-                <a:latin typeface="Arial"/>
-              </a:rPr>
-              <a:t/>
-            </a:r>
-          </a:p>
-        </p:txBody>
-      </p:sp>
-      <p:sp>
-        <p:nvSpPr>
-          <p:cNvPr id="4" name="TextBox 3"/>
-          <p:cNvSpPr txBox="1"/>
-          <p:nvPr/>
-        </p:nvSpPr>
-        <p:spPr>
-          <a:xfrm>
-            <a:off x="594360" y="3529584"/>
-            <a:ext cx="11002975" cy="685800"/>
-          </a:xfrm>
-          <a:prstGeom prst="rect">
-            <a:avLst/>
-          </a:prstGeom>
-          <a:noFill/>
-        </p:spPr>
-        <p:txBody>
-          <a:bodyPr wrap="square">
-            <a:spAutoFit/>
-          </a:bodyPr>
-          <a:lstStyle/>
-          <a:p>
-            <a:pPr algn="ctr"/>
-            <a:r>
-              <a:rPr sz="4022" b="1" i="0">
+              <a:rPr sz="4300" b="1" i="0">
                 <a:solidFill>
                   <a:srgbClr val="FFFFFF"/>
                 </a:solidFill>
                 <a:latin typeface="Arial"/>
               </a:rPr>
               <a:t>Através da tempestade, Ele é Senhor</a:t>
-            </a:r>
-          </a:p>
-        </p:txBody>
-      </p:sp>
-      <p:sp>
-        <p:nvSpPr>
-          <p:cNvPr id="5" name="TextBox 4"/>
-          <p:cNvSpPr txBox="1"/>
-          <p:nvPr/>
-        </p:nvSpPr>
-        <p:spPr>
-          <a:xfrm>
-            <a:off x="594360" y="4251960"/>
-            <a:ext cx="11002975" cy="347472"/>
-          </a:xfrm>
-          <a:prstGeom prst="rect">
-            <a:avLst/>
-          </a:prstGeom>
-          <a:noFill/>
-        </p:spPr>
-        <p:txBody>
-          <a:bodyPr wrap="square">
-            <a:spAutoFit/>
-          </a:bodyPr>
-          <a:lstStyle/>
-          <a:p>
-            <a:pPr algn="ctr"/>
-            <a:r>
-              <a:rPr sz="2200" b="0" i="1">
-                <a:solidFill>
-                  <a:srgbClr val="8C8C8C"/>
-                </a:solidFill>
-                <a:latin typeface="Arial"/>
-              </a:rPr>
-              <a:t/>
             </a:r>
           </a:p>
         </p:txBody>

--- a/output_pptx/Cornerstone.pptx
+++ b/output_pptx/Cornerstone.pptx
@@ -3171,6 +3171,76 @@
           </a:p>
         </p:txBody>
       </p:sp>
+      <p:sp>
+        <p:nvSpPr>
+          <p:cNvPr id="4" name="TextBox 3"/>
+          <p:cNvSpPr txBox="1"/>
+          <p:nvPr/>
+        </p:nvSpPr>
+        <p:spPr>
+          <a:xfrm>
+            <a:off x="640080" y="4128516"/>
+            <a:ext cx="10911535" cy="310896"/>
+          </a:xfrm>
+          <a:prstGeom prst="rect">
+            <a:avLst/>
+          </a:prstGeom>
+          <a:noFill/>
+        </p:spPr>
+        <p:txBody>
+          <a:bodyPr wrap="square">
+            <a:spAutoFit/>
+          </a:bodyPr>
+          <a:lstStyle/>
+          <a:p>
+            <a:pPr algn="ctr"/>
+            <a:r>
+              <a:rPr sz="2000" b="0" i="0">
+                <a:solidFill>
+                  <a:srgbClr val="828282"/>
+                </a:solidFill>
+                <a:latin typeface="Arial"/>
+              </a:rPr>
+              <a:t>キリスト、礎の石</a:t>
+            </a:r>
+          </a:p>
+        </p:txBody>
+      </p:sp>
+      <p:sp>
+        <p:nvSpPr>
+          <p:cNvPr id="5" name="TextBox 4"/>
+          <p:cNvSpPr txBox="1"/>
+          <p:nvPr/>
+        </p:nvSpPr>
+        <p:spPr>
+          <a:xfrm>
+            <a:off x="640080" y="4494276"/>
+            <a:ext cx="10911535" cy="310896"/>
+          </a:xfrm>
+          <a:prstGeom prst="rect">
+            <a:avLst/>
+          </a:prstGeom>
+          <a:noFill/>
+        </p:spPr>
+        <p:txBody>
+          <a:bodyPr wrap="square">
+            <a:spAutoFit/>
+          </a:bodyPr>
+          <a:lstStyle/>
+          <a:p>
+            <a:pPr algn="ctr"/>
+            <a:r>
+              <a:rPr sz="2000" b="0" i="0">
+                <a:solidFill>
+                  <a:srgbClr val="828282"/>
+                </a:solidFill>
+                <a:latin typeface="Arial"/>
+              </a:rPr>
+              <a:t>私の希望は堅く立てられている</a:t>
+            </a:r>
+          </a:p>
+        </p:txBody>
+      </p:sp>
     </p:spTree>
   </p:cSld>
   <p:clrMapOvr>
@@ -3267,6 +3337,76 @@
           </a:p>
         </p:txBody>
       </p:sp>
+      <p:sp>
+        <p:nvSpPr>
+          <p:cNvPr id="4" name="TextBox 3"/>
+          <p:cNvSpPr txBox="1"/>
+          <p:nvPr/>
+        </p:nvSpPr>
+        <p:spPr>
+          <a:xfrm>
+            <a:off x="640080" y="4128516"/>
+            <a:ext cx="10911535" cy="310896"/>
+          </a:xfrm>
+          <a:prstGeom prst="rect">
+            <a:avLst/>
+          </a:prstGeom>
+          <a:noFill/>
+        </p:spPr>
+        <p:txBody>
+          <a:bodyPr wrap="square">
+            <a:spAutoFit/>
+          </a:bodyPr>
+          <a:lstStyle/>
+          <a:p>
+            <a:pPr algn="ctr"/>
+            <a:r>
+              <a:rPr sz="2000" b="0" i="0">
+                <a:solidFill>
+                  <a:srgbClr val="828282"/>
+                </a:solidFill>
+                <a:latin typeface="Arial"/>
+              </a:rPr>
+              <a:t>イエスの血と正義の中に</a:t>
+            </a:r>
+          </a:p>
+        </p:txBody>
+      </p:sp>
+      <p:sp>
+        <p:nvSpPr>
+          <p:cNvPr id="5" name="TextBox 4"/>
+          <p:cNvSpPr txBox="1"/>
+          <p:nvPr/>
+        </p:nvSpPr>
+        <p:spPr>
+          <a:xfrm>
+            <a:off x="640080" y="4494276"/>
+            <a:ext cx="10911535" cy="310896"/>
+          </a:xfrm>
+          <a:prstGeom prst="rect">
+            <a:avLst/>
+          </a:prstGeom>
+          <a:noFill/>
+        </p:spPr>
+        <p:txBody>
+          <a:bodyPr wrap="square">
+            <a:spAutoFit/>
+          </a:bodyPr>
+          <a:lstStyle/>
+          <a:p>
+            <a:pPr algn="ctr"/>
+            <a:r>
+              <a:rPr sz="2000" b="0" i="0">
+                <a:solidFill>
+                  <a:srgbClr val="828282"/>
+                </a:solidFill>
+                <a:latin typeface="Arial"/>
+              </a:rPr>
+              <a:t>私は何の善意にも信頼することはない</a:t>
+            </a:r>
+          </a:p>
+        </p:txBody>
+      </p:sp>
     </p:spTree>
   </p:cSld>
   <p:clrMapOvr>
@@ -3363,6 +3503,76 @@
           </a:p>
         </p:txBody>
       </p:sp>
+      <p:sp>
+        <p:nvSpPr>
+          <p:cNvPr id="4" name="TextBox 3"/>
+          <p:cNvSpPr txBox="1"/>
+          <p:nvPr/>
+        </p:nvSpPr>
+        <p:spPr>
+          <a:xfrm>
+            <a:off x="640080" y="4128516"/>
+            <a:ext cx="10911535" cy="310896"/>
+          </a:xfrm>
+          <a:prstGeom prst="rect">
+            <a:avLst/>
+          </a:prstGeom>
+          <a:noFill/>
+        </p:spPr>
+        <p:txBody>
+          <a:bodyPr wrap="square">
+            <a:spAutoFit/>
+          </a:bodyPr>
+          <a:lstStyle/>
+          <a:p>
+            <a:pPr algn="ctr"/>
+            <a:r>
+              <a:rPr sz="2000" b="0" i="0">
+                <a:solidFill>
+                  <a:srgbClr val="828282"/>
+                </a:solidFill>
+                <a:latin typeface="Arial"/>
+              </a:rPr>
+              <a:t>すべての主</a:t>
+            </a:r>
+          </a:p>
+        </p:txBody>
+      </p:sp>
+      <p:sp>
+        <p:nvSpPr>
+          <p:cNvPr id="5" name="TextBox 4"/>
+          <p:cNvSpPr txBox="1"/>
+          <p:nvPr/>
+        </p:nvSpPr>
+        <p:spPr>
+          <a:xfrm>
+            <a:off x="640080" y="4494276"/>
+            <a:ext cx="10911535" cy="310896"/>
+          </a:xfrm>
+          <a:prstGeom prst="rect">
+            <a:avLst/>
+          </a:prstGeom>
+          <a:noFill/>
+        </p:spPr>
+        <p:txBody>
+          <a:bodyPr wrap="square">
+            <a:spAutoFit/>
+          </a:bodyPr>
+          <a:lstStyle/>
+          <a:p>
+            <a:pPr algn="ctr"/>
+            <a:r>
+              <a:rPr sz="2000" b="0" i="0">
+                <a:solidFill>
+                  <a:srgbClr val="828282"/>
+                </a:solidFill>
+                <a:latin typeface="Arial"/>
+              </a:rPr>
+              <a:t>暗闇が主の御顔を隠すように見えるとき</a:t>
+            </a:r>
+          </a:p>
+        </p:txBody>
+      </p:sp>
     </p:spTree>
   </p:cSld>
   <p:clrMapOvr>
@@ -3459,6 +3669,76 @@
           </a:p>
         </p:txBody>
       </p:sp>
+      <p:sp>
+        <p:nvSpPr>
+          <p:cNvPr id="4" name="TextBox 3"/>
+          <p:cNvSpPr txBox="1"/>
+          <p:nvPr/>
+        </p:nvSpPr>
+        <p:spPr>
+          <a:xfrm>
+            <a:off x="640080" y="4128516"/>
+            <a:ext cx="10911535" cy="310896"/>
+          </a:xfrm>
+          <a:prstGeom prst="rect">
+            <a:avLst/>
+          </a:prstGeom>
+          <a:noFill/>
+        </p:spPr>
+        <p:txBody>
+          <a:bodyPr wrap="square">
+            <a:spAutoFit/>
+          </a:bodyPr>
+          <a:lstStyle/>
+          <a:p>
+            <a:pPr algn="ctr"/>
+            <a:r>
+              <a:rPr sz="2000" b="0" i="0">
+                <a:solidFill>
+                  <a:srgbClr val="828282"/>
+                </a:solidFill>
+                <a:latin typeface="Arial"/>
+              </a:rPr>
+              <a:t>主の変わらぬ恵みの中に憩う</a:t>
+            </a:r>
+          </a:p>
+        </p:txBody>
+      </p:sp>
+      <p:sp>
+        <p:nvSpPr>
+          <p:cNvPr id="5" name="TextBox 4"/>
+          <p:cNvSpPr txBox="1"/>
+          <p:nvPr/>
+        </p:nvSpPr>
+        <p:spPr>
+          <a:xfrm>
+            <a:off x="640080" y="4494276"/>
+            <a:ext cx="10911535" cy="310896"/>
+          </a:xfrm>
+          <a:prstGeom prst="rect">
+            <a:avLst/>
+          </a:prstGeom>
+          <a:noFill/>
+        </p:spPr>
+        <p:txBody>
+          <a:bodyPr wrap="square">
+            <a:spAutoFit/>
+          </a:bodyPr>
+          <a:lstStyle/>
+          <a:p>
+            <a:pPr algn="ctr"/>
+            <a:r>
+              <a:rPr sz="2000" b="0" i="0">
+                <a:solidFill>
+                  <a:srgbClr val="828282"/>
+                </a:solidFill>
+                <a:latin typeface="Arial"/>
+              </a:rPr>
+              <a:t>激しく嵐のような時の中で</a:t>
+            </a:r>
+          </a:p>
+        </p:txBody>
+      </p:sp>
     </p:spTree>
   </p:cSld>
   <p:clrMapOvr>
@@ -3555,6 +3835,76 @@
           </a:p>
         </p:txBody>
       </p:sp>
+      <p:sp>
+        <p:nvSpPr>
+          <p:cNvPr id="4" name="TextBox 3"/>
+          <p:cNvSpPr txBox="1"/>
+          <p:nvPr/>
+        </p:nvSpPr>
+        <p:spPr>
+          <a:xfrm>
+            <a:off x="640080" y="4128516"/>
+            <a:ext cx="10911535" cy="310896"/>
+          </a:xfrm>
+          <a:prstGeom prst="rect">
+            <a:avLst/>
+          </a:prstGeom>
+          <a:noFill/>
+        </p:spPr>
+        <p:txBody>
+          <a:bodyPr wrap="square">
+            <a:spAutoFit/>
+          </a:bodyPr>
+          <a:lstStyle/>
+          <a:p>
+            <a:pPr algn="ctr"/>
+            <a:r>
+              <a:rPr sz="2000" b="0" i="0">
+                <a:solidFill>
+                  <a:srgbClr val="828282"/>
+                </a:solidFill>
+                <a:latin typeface="Arial"/>
+              </a:rPr>
+              <a:t>私の確かな錨は立ち続ける</a:t>
+            </a:r>
+          </a:p>
+        </p:txBody>
+      </p:sp>
+      <p:sp>
+        <p:nvSpPr>
+          <p:cNvPr id="5" name="TextBox 4"/>
+          <p:cNvSpPr txBox="1"/>
+          <p:nvPr/>
+        </p:nvSpPr>
+        <p:spPr>
+          <a:xfrm>
+            <a:off x="640080" y="4494276"/>
+            <a:ext cx="10911535" cy="310896"/>
+          </a:xfrm>
+          <a:prstGeom prst="rect">
+            <a:avLst/>
+          </a:prstGeom>
+          <a:noFill/>
+        </p:spPr>
+        <p:txBody>
+          <a:bodyPr wrap="square">
+            <a:spAutoFit/>
+          </a:bodyPr>
+          <a:lstStyle/>
+          <a:p>
+            <a:pPr algn="ctr"/>
+            <a:r>
+              <a:rPr sz="2000" b="0" i="0">
+                <a:solidFill>
+                  <a:srgbClr val="828282"/>
+                </a:solidFill>
+                <a:latin typeface="Arial"/>
+              </a:rPr>
+              <a:t>ただキリスト！礎の石</a:t>
+            </a:r>
+          </a:p>
+        </p:txBody>
+      </p:sp>
     </p:spTree>
   </p:cSld>
   <p:clrMapOvr>
@@ -3647,6 +3997,76 @@
                 <a:latin typeface="Arial"/>
               </a:rPr>
               <a:t>Através da tempestade, Ele é Senhor</a:t>
+            </a:r>
+          </a:p>
+        </p:txBody>
+      </p:sp>
+      <p:sp>
+        <p:nvSpPr>
+          <p:cNvPr id="4" name="TextBox 3"/>
+          <p:cNvSpPr txBox="1"/>
+          <p:nvPr/>
+        </p:nvSpPr>
+        <p:spPr>
+          <a:xfrm>
+            <a:off x="640080" y="4128516"/>
+            <a:ext cx="10911535" cy="310896"/>
+          </a:xfrm>
+          <a:prstGeom prst="rect">
+            <a:avLst/>
+          </a:prstGeom>
+          <a:noFill/>
+        </p:spPr>
+        <p:txBody>
+          <a:bodyPr wrap="square">
+            <a:spAutoFit/>
+          </a:bodyPr>
+          <a:lstStyle/>
+          <a:p>
+            <a:pPr algn="ctr"/>
+            <a:r>
+              <a:rPr sz="2000" b="0" i="0">
+                <a:solidFill>
+                  <a:srgbClr val="828282"/>
+                </a:solidFill>
+                <a:latin typeface="Arial"/>
+              </a:rPr>
+              <a:t>救い主の愛の中で弱さから強さへ</a:t>
+            </a:r>
+          </a:p>
+        </p:txBody>
+      </p:sp>
+      <p:sp>
+        <p:nvSpPr>
+          <p:cNvPr id="5" name="TextBox 4"/>
+          <p:cNvSpPr txBox="1"/>
+          <p:nvPr/>
+        </p:nvSpPr>
+        <p:spPr>
+          <a:xfrm>
+            <a:off x="640080" y="4494276"/>
+            <a:ext cx="10911535" cy="310896"/>
+          </a:xfrm>
+          <a:prstGeom prst="rect">
+            <a:avLst/>
+          </a:prstGeom>
+          <a:noFill/>
+        </p:spPr>
+        <p:txBody>
+          <a:bodyPr wrap="square">
+            <a:spAutoFit/>
+          </a:bodyPr>
+          <a:lstStyle/>
+          <a:p>
+            <a:pPr algn="ctr"/>
+            <a:r>
+              <a:rPr sz="2000" b="0" i="0">
+                <a:solidFill>
+                  <a:srgbClr val="828282"/>
+                </a:solidFill>
+                <a:latin typeface="Arial"/>
+              </a:rPr>
+              <a:t>嵐を通して、主は主である</a:t>
             </a:r>
           </a:p>
         </p:txBody>
